--- a/LOLEX_포트폴리오.pptx
+++ b/LOLEX_포트폴리오.pptx
@@ -3597,7 +3597,7 @@
                 </a:solidFill>
                 <a:latin typeface="맑은 고딕"/>
               </a:rPr>
-              <a:t>라이브 서비스 운영</a:t>
+              <a:t>과정 기간 공개 운영</a:t>
             </a:r>
           </a:p>
         </p:txBody>
@@ -3813,7 +3813,7 @@
                 </a:solidFill>
                 <a:latin typeface="맑은 고딕"/>
               </a:rPr>
-              <a:t>      Live  </a:t>
+              <a:t>      로컬 실행  </a:t>
             </a:r>
             <a:r>
               <a:rPr sz="1100" b="1">
@@ -3822,7 +3822,7 @@
                 </a:solidFill>
                 <a:latin typeface="맑은 고딕"/>
               </a:rPr>
-              <a:t>p4.sumzip.com</a:t>
+              <a:t>predict.py</a:t>
             </a:r>
             <a:r>
               <a:rPr sz="1200" b="0">
@@ -3986,7 +3986,7 @@
                 </a:solidFill>
                 <a:latin typeface="맑은 고딕"/>
               </a:rPr>
-              <a:t>모델이 화면이 되기까지 — p4.sumzip.com</a:t>
+              <a:t>모델이 화면이 되기까지</a:t>
             </a:r>
           </a:p>
         </p:txBody>
@@ -4028,7 +4028,7 @@
                 </a:solidFill>
                 <a:latin typeface="맑은 고딕"/>
               </a:rPr>
-              <a:t>탭 4개 · 운영 중</a:t>
+              <a:t>탭 4개 · 2026.09 운영</a:t>
             </a:r>
           </a:p>
         </p:txBody>
@@ -5333,7 +5333,7 @@
                 </a:solidFill>
                 <a:latin typeface="맑은 고딕"/>
               </a:rPr>
-              <a:t>        Live  </a:t>
+              <a:t>        로컬 실행  </a:t>
             </a:r>
             <a:r>
               <a:rPr sz="1150" b="1">
@@ -5342,7 +5342,7 @@
                 </a:solidFill>
                 <a:latin typeface="맑은 고딕"/>
               </a:rPr>
-              <a:t>p4.sumzip.com</a:t>
+              <a:t>predict.py</a:t>
             </a:r>
           </a:p>
           <a:p>
